--- a/section1_intro.pptx
+++ b/section1_intro.pptx
@@ -4,16 +4,16 @@
   <p:sldMasterIdLst>
     <p:sldMasterId id="2147483648" r:id="rId1"/>
   </p:sldMasterIdLst>
+  <p:notesMasterIdLst>
+    <p:notesMasterId r:id="rId6"/>
+  </p:notesMasterIdLst>
   <p:sldIdLst>
     <p:sldId id="256" r:id="rId2"/>
     <p:sldId id="257" r:id="rId3"/>
     <p:sldId id="258" r:id="rId4"/>
     <p:sldId id="259" r:id="rId5"/>
   </p:sldIdLst>
-  <p:notesMasterIdLst>
-    <p:notesMasterId r:id="rId6"/>
-  </p:notesMasterIdLst>
-  <p:sldSz cx="9144000" cy="5143500"/>
+  <p:sldSz cx="9144000" cy="5143500" type="screen16x9"/>
   <p:notesSz cx="5143500" cy="9144000"/>
   <p:defaultTextStyle>
     <a:lvl1pPr marL="0" algn="l" defTabSz="914400" rtl="0" eaLnBrk="1" latinLnBrk="0" hangingPunct="1">
@@ -107,6 +107,11 @@
       </a:defRPr>
     </a:lvl9pPr>
   </p:defaultTextStyle>
+  <p:extLst>
+    <p:ext uri="{EFAFB233-063F-42B5-8137-9DF3F51BA10A}">
+      <p15:sldGuideLst xmlns:p15="http://schemas.microsoft.com/office/powerpoint/2012/main"/>
+    </p:ext>
+  </p:extLst>
 </p:presentation>
 </file>
 
@@ -132,240 +137,16 @@
           <a:chExt cx="0" cy="0"/>
         </a:xfrm>
       </p:grpSpPr>
-      <p:sp>
-        <p:nvSpPr>
-          <p:cNvPr id="2" name="Header Placeholder 1"/>
-          <p:cNvSpPr>
-            <a:spLocks noGrp="1"/>
-          </p:cNvSpPr>
-          <p:nvPr>
-            <p:ph type="hdr" sz="quarter"/>
-          </p:nvPr>
-        </p:nvSpPr>
-        <p:spPr>
-          <a:xfrm>
-            <a:off x="0" y="0"/>
-            <a:ext cx="2971800" cy="458788"/>
-          </a:xfrm>
-          <a:prstGeom prst="rect">
-            <a:avLst/>
-          </a:prstGeom>
-        </p:spPr>
-        <p:txBody>
-          <a:bodyPr vert="horz" lIns="91440" tIns="45720" rIns="91440" bIns="45720" rtlCol="0"/>
-          <a:lstStyle>
-            <a:lvl1pPr algn="l">
-              <a:defRPr sz="1200"/>
-            </a:lvl1pPr>
-          </a:lstStyle>
-          <a:p>
-            <a:endParaRPr lang="en-US"/>
-          </a:p>
-        </p:txBody>
-      </p:sp>
-      <p:sp>
-        <p:nvSpPr>
-          <p:cNvPr id="3" name="Date Placeholder 2"/>
-          <p:cNvSpPr>
-            <a:spLocks noGrp="1"/>
-          </p:cNvSpPr>
-          <p:nvPr>
-            <p:ph type="dt" idx="1"/>
-          </p:nvPr>
-        </p:nvSpPr>
-        <p:spPr>
-          <a:xfrm>
-            <a:off x="3884613" y="0"/>
-            <a:ext cx="2971800" cy="458788"/>
-          </a:xfrm>
-          <a:prstGeom prst="rect">
-            <a:avLst/>
-          </a:prstGeom>
-        </p:spPr>
-        <p:txBody>
-          <a:bodyPr vert="horz" lIns="91440" tIns="45720" rIns="91440" bIns="45720" rtlCol="0"/>
-          <a:lstStyle>
-            <a:lvl1pPr algn="r">
-              <a:defRPr sz="1200"/>
-            </a:lvl1pPr>
-          </a:lstStyle>
-          <a:p>
-            <a:fld id="{5282F153-3F37-0F45-9E97-73ACFA13230C}" type="datetimeFigureOut">
-              <a:rPr lang="en-US"/>
-              <a:t>7/23/19</a:t>
-            </a:fld>
-            <a:endParaRPr lang="en-US"/>
-          </a:p>
-        </p:txBody>
-      </p:sp>
-      <p:sp>
-        <p:nvSpPr>
-          <p:cNvPr id="4" name="Slide Image Placeholder 3"/>
-          <p:cNvSpPr>
-            <a:spLocks noGrp="1" noRot="1" noChangeAspect="1"/>
-          </p:cNvSpPr>
-          <p:nvPr>
-            <p:ph type="sldImg" idx="2"/>
-          </p:nvPr>
-        </p:nvSpPr>
-        <p:spPr>
-          <a:xfrm>
-            <a:off x="685800" y="1143000"/>
-            <a:ext cx="5486400" cy="3086100"/>
-          </a:xfrm>
-          <a:prstGeom prst="rect">
-            <a:avLst/>
-          </a:prstGeom>
-          <a:noFill/>
-          <a:ln w="12700">
-            <a:solidFill>
-              <a:prstClr val="black"/>
-            </a:solidFill>
-          </a:ln>
-        </p:spPr>
-        <p:txBody>
-          <a:bodyPr vert="horz" lIns="91440" tIns="45720" rIns="91440" bIns="45720" rtlCol="0" anchor="ctr"/>
-          <a:lstStyle/>
-          <a:p>
-            <a:endParaRPr lang="en-US"/>
-          </a:p>
-        </p:txBody>
-      </p:sp>
-      <p:sp>
-        <p:nvSpPr>
-          <p:cNvPr id="5" name="Notes Placeholder 4"/>
-          <p:cNvSpPr>
-            <a:spLocks noGrp="1"/>
-          </p:cNvSpPr>
-          <p:nvPr>
-            <p:ph type="body" sz="quarter" idx="3"/>
-          </p:nvPr>
-        </p:nvSpPr>
-        <p:spPr>
-          <a:xfrm>
-            <a:off x="685800" y="4400550"/>
-            <a:ext cx="5486400" cy="3600450"/>
-          </a:xfrm>
-          <a:prstGeom prst="rect">
-            <a:avLst/>
-          </a:prstGeom>
-        </p:spPr>
-        <p:txBody>
-          <a:bodyPr vert="horz" lIns="91440" tIns="45720" rIns="91440" bIns="45720" rtlCol="0"/>
-          <a:lstStyle/>
-          <a:p>
-            <a:pPr lvl="0"/>
-            <a:r>
-              <a:rPr lang="en-US"/>
-              <a:t>Click to edit Master text styles</a:t>
-            </a:r>
-          </a:p>
-          <a:p>
-            <a:pPr lvl="1"/>
-            <a:r>
-              <a:rPr lang="en-US"/>
-              <a:t>Second level</a:t>
-            </a:r>
-          </a:p>
-          <a:p>
-            <a:pPr lvl="2"/>
-            <a:r>
-              <a:rPr lang="en-US"/>
-              <a:t>Third level</a:t>
-            </a:r>
-          </a:p>
-          <a:p>
-            <a:pPr lvl="3"/>
-            <a:r>
-              <a:rPr lang="en-US"/>
-              <a:t>Fourth level</a:t>
-            </a:r>
-          </a:p>
-          <a:p>
-            <a:pPr lvl="4"/>
-            <a:r>
-              <a:rPr lang="en-US"/>
-              <a:t>Fifth level</a:t>
-            </a:r>
-          </a:p>
-        </p:txBody>
-      </p:sp>
-      <p:sp>
-        <p:nvSpPr>
-          <p:cNvPr id="6" name="Footer Placeholder 5"/>
-          <p:cNvSpPr>
-            <a:spLocks noGrp="1"/>
-          </p:cNvSpPr>
-          <p:nvPr>
-            <p:ph type="ftr" sz="quarter" idx="4"/>
-          </p:nvPr>
-        </p:nvSpPr>
-        <p:spPr>
-          <a:xfrm>
-            <a:off x="0" y="8685213"/>
-            <a:ext cx="2971800" cy="458787"/>
-          </a:xfrm>
-          <a:prstGeom prst="rect">
-            <a:avLst/>
-          </a:prstGeom>
-        </p:spPr>
-        <p:txBody>
-          <a:bodyPr vert="horz" lIns="91440" tIns="45720" rIns="91440" bIns="45720" rtlCol="0" anchor="b"/>
-          <a:lstStyle>
-            <a:lvl1pPr algn="l">
-              <a:defRPr sz="1200"/>
-            </a:lvl1pPr>
-          </a:lstStyle>
-          <a:p>
-            <a:endParaRPr lang="en-US"/>
-          </a:p>
-        </p:txBody>
-      </p:sp>
-      <p:sp>
-        <p:nvSpPr>
-          <p:cNvPr id="7" name="Slide Number Placeholder 6"/>
-          <p:cNvSpPr>
-            <a:spLocks noGrp="1"/>
-          </p:cNvSpPr>
-          <p:nvPr>
-            <p:ph type="sldNum" sz="quarter" idx="5"/>
-          </p:nvPr>
-        </p:nvSpPr>
-        <p:spPr>
-          <a:xfrm>
-            <a:off x="3884613" y="8685213"/>
-            <a:ext cx="2971800" cy="458787"/>
-          </a:xfrm>
-          <a:prstGeom prst="rect">
-            <a:avLst/>
-          </a:prstGeom>
-        </p:spPr>
-        <p:txBody>
-          <a:bodyPr vert="horz" lIns="91440" tIns="45720" rIns="91440" bIns="45720" rtlCol="0" anchor="b"/>
-          <a:lstStyle>
-            <a:lvl1pPr algn="r">
-              <a:defRPr sz="1200"/>
-            </a:lvl1pPr>
-          </a:lstStyle>
-          <a:p>
-            <a:fld id="{CE5E9CC1-C706-0F49-92D6-E571CC5EEA8F}" type="slidenum">
-              <a:rPr lang="en-US"/>
-              <a:t>‹#›</a:t>
-            </a:fld>
-            <a:endParaRPr lang="en-US"/>
-          </a:p>
-        </p:txBody>
-      </p:sp>
     </p:spTree>
     <p:extLst>
       <p:ext uri="{BB962C8B-B14F-4D97-AF65-F5344CB8AC3E}">
-        <p14:creationId xmlns:p14="http://schemas.microsoft.com/office/powerpoint/2010/main" val="1024086991"/>
+        <p14:creationId xmlns:p14="http://schemas.microsoft.com/office/powerpoint/2010/main" val="2966718711"/>
       </p:ext>
     </p:extLst>
   </p:cSld>
   <p:clrMap bg1="lt1" tx1="dk1" bg2="lt2" tx2="dk2" accent1="accent1" accent2="accent2" accent3="accent3" accent4="accent4" accent5="accent5" accent6="accent6" hlink="hlink" folHlink="folHlink"/>
   <p:notesStyle>
-    <a:lvl1pPr marL="0" algn="l" defTabSz="914400" rtl="0" eaLnBrk="1" latinLnBrk="0" hangingPunct="1">
+    <a:lvl1pPr marL="0" algn="l" defTabSz="914400" rtl="0" eaLnBrk="1" latinLnBrk="1" hangingPunct="1">
       <a:defRPr sz="1200" kern="1200">
         <a:solidFill>
           <a:schemeClr val="tx1"/>
@@ -375,7 +156,7 @@
         <a:cs typeface="+mn-cs"/>
       </a:defRPr>
     </a:lvl1pPr>
-    <a:lvl2pPr marL="457200" algn="l" defTabSz="914400" rtl="0" eaLnBrk="1" latinLnBrk="0" hangingPunct="1">
+    <a:lvl2pPr marL="457200" algn="l" defTabSz="914400" rtl="0" eaLnBrk="1" latinLnBrk="1" hangingPunct="1">
       <a:defRPr sz="1200" kern="1200">
         <a:solidFill>
           <a:schemeClr val="tx1"/>
@@ -385,7 +166,7 @@
         <a:cs typeface="+mn-cs"/>
       </a:defRPr>
     </a:lvl2pPr>
-    <a:lvl3pPr marL="914400" algn="l" defTabSz="914400" rtl="0" eaLnBrk="1" latinLnBrk="0" hangingPunct="1">
+    <a:lvl3pPr marL="914400" algn="l" defTabSz="914400" rtl="0" eaLnBrk="1" latinLnBrk="1" hangingPunct="1">
       <a:defRPr sz="1200" kern="1200">
         <a:solidFill>
           <a:schemeClr val="tx1"/>
@@ -395,7 +176,7 @@
         <a:cs typeface="+mn-cs"/>
       </a:defRPr>
     </a:lvl3pPr>
-    <a:lvl4pPr marL="1371600" algn="l" defTabSz="914400" rtl="0" eaLnBrk="1" latinLnBrk="0" hangingPunct="1">
+    <a:lvl4pPr marL="1371600" algn="l" defTabSz="914400" rtl="0" eaLnBrk="1" latinLnBrk="1" hangingPunct="1">
       <a:defRPr sz="1200" kern="1200">
         <a:solidFill>
           <a:schemeClr val="tx1"/>
@@ -405,7 +186,7 @@
         <a:cs typeface="+mn-cs"/>
       </a:defRPr>
     </a:lvl4pPr>
-    <a:lvl5pPr marL="1828800" algn="l" defTabSz="914400" rtl="0" eaLnBrk="1" latinLnBrk="0" hangingPunct="1">
+    <a:lvl5pPr marL="1828800" algn="l" defTabSz="914400" rtl="0" eaLnBrk="1" latinLnBrk="1" hangingPunct="1">
       <a:defRPr sz="1200" kern="1200">
         <a:solidFill>
           <a:schemeClr val="tx1"/>
@@ -415,7 +196,7 @@
         <a:cs typeface="+mn-cs"/>
       </a:defRPr>
     </a:lvl5pPr>
-    <a:lvl6pPr marL="2286000" algn="l" defTabSz="914400" rtl="0" eaLnBrk="1" latinLnBrk="0" hangingPunct="1">
+    <a:lvl6pPr marL="2286000" algn="l" defTabSz="914400" rtl="0" eaLnBrk="1" latinLnBrk="1" hangingPunct="1">
       <a:defRPr sz="1200" kern="1200">
         <a:solidFill>
           <a:schemeClr val="tx1"/>
@@ -425,7 +206,7 @@
         <a:cs typeface="+mn-cs"/>
       </a:defRPr>
     </a:lvl6pPr>
-    <a:lvl7pPr marL="2743200" algn="l" defTabSz="914400" rtl="0" eaLnBrk="1" latinLnBrk="0" hangingPunct="1">
+    <a:lvl7pPr marL="2743200" algn="l" defTabSz="914400" rtl="0" eaLnBrk="1" latinLnBrk="1" hangingPunct="1">
       <a:defRPr sz="1200" kern="1200">
         <a:solidFill>
           <a:schemeClr val="tx1"/>
@@ -435,7 +216,7 @@
         <a:cs typeface="+mn-cs"/>
       </a:defRPr>
     </a:lvl7pPr>
-    <a:lvl8pPr marL="3200400" algn="l" defTabSz="914400" rtl="0" eaLnBrk="1" latinLnBrk="0" hangingPunct="1">
+    <a:lvl8pPr marL="3200400" algn="l" defTabSz="914400" rtl="0" eaLnBrk="1" latinLnBrk="1" hangingPunct="1">
       <a:defRPr sz="1200" kern="1200">
         <a:solidFill>
           <a:schemeClr val="tx1"/>
@@ -445,7 +226,7 @@
         <a:cs typeface="+mn-cs"/>
       </a:defRPr>
     </a:lvl8pPr>
-    <a:lvl9pPr marL="3657600" algn="l" defTabSz="914400" rtl="0" eaLnBrk="1" latinLnBrk="0" hangingPunct="1">
+    <a:lvl9pPr marL="3657600" algn="l" defTabSz="914400" rtl="0" eaLnBrk="1" latinLnBrk="1" hangingPunct="1">
       <a:defRPr sz="1200" kern="1200">
         <a:solidFill>
           <a:schemeClr val="tx1"/>
@@ -503,10 +284,6 @@
           <a:bodyPr/>
           <a:lstStyle/>
           <a:p>
-            <a:r>
-              <a:rPr lang="en-US" dirty="0"/>
-              <a:t/>
-            </a:r>
             <a:endParaRPr lang="en-US" dirty="0"/>
           </a:p>
         </p:txBody>
@@ -591,10 +368,6 @@
           <a:bodyPr/>
           <a:lstStyle/>
           <a:p>
-            <a:r>
-              <a:rPr lang="en-US" dirty="0"/>
-              <a:t/>
-            </a:r>
             <a:endParaRPr lang="en-US" dirty="0"/>
           </a:p>
         </p:txBody>
@@ -679,10 +452,6 @@
           <a:bodyPr/>
           <a:lstStyle/>
           <a:p>
-            <a:r>
-              <a:rPr lang="en-US" dirty="0"/>
-              <a:t/>
-            </a:r>
             <a:endParaRPr lang="en-US" dirty="0"/>
           </a:p>
         </p:txBody>
@@ -767,10 +536,6 @@
           <a:bodyPr/>
           <a:lstStyle/>
           <a:p>
-            <a:r>
-              <a:rPr lang="en-US" dirty="0"/>
-              <a:t/>
-            </a:r>
             <a:endParaRPr lang="en-US" dirty="0"/>
           </a:p>
         </p:txBody>
@@ -844,6 +609,11 @@
 <file path=ppt/slideMasters/slideMaster1.xml><?xml version="1.0" encoding="utf-8"?>
 <p:sldMaster xmlns:a="http://schemas.openxmlformats.org/drawingml/2006/main" xmlns:r="http://schemas.openxmlformats.org/officeDocument/2006/relationships" xmlns:p="http://schemas.openxmlformats.org/presentationml/2006/main">
   <p:cSld>
+    <p:bg>
+      <p:bgRef idx="1001">
+        <a:schemeClr val="bg1"/>
+      </p:bgRef>
+    </p:bg>
     <p:spTree>
       <p:nvGrpSpPr>
         <p:cNvPr id="1" name=""/>
@@ -1156,7 +926,7 @@
           <a:bodyPr wrap="square" rtlCol="0" anchor="ctr"/>
           <a:lstStyle/>
           <a:p>
-            <a:pPr algn="l" indent="0" marL="0">
+            <a:pPr marL="0" indent="0" algn="l">
               <a:buNone/>
             </a:pPr>
             <a:r>
@@ -1195,7 +965,7 @@
           <a:bodyPr wrap="square" rtlCol="0" anchor="ctr"/>
           <a:lstStyle/>
           <a:p>
-            <a:pPr algn="l" indent="0" marL="0">
+            <a:pPr marL="0" indent="0" algn="l">
               <a:buNone/>
             </a:pPr>
             <a:r>
@@ -1207,9 +977,49 @@
                 <a:ea typeface="Noto Sans CJK KR" pitchFamily="34" charset="-122"/>
                 <a:cs typeface="Noto Sans CJK KR" pitchFamily="34" charset="-120"/>
               </a:rPr>
-              <a:t>Safety-Critical 통신을 위한 결정론적 시간 분할 접근</a:t>
-            </a:r>
-            <a:endParaRPr lang="en-US" sz="2000" dirty="0"/>
+              <a:t>Safety-Critical 통신을 위한 결정론적 시간 </a:t>
+            </a:r>
+            <a:r>
+              <a:rPr lang="en-US" sz="2000" dirty="0" err="1">
+                <a:solidFill>
+                  <a:srgbClr val="666666"/>
+                </a:solidFill>
+                <a:latin typeface="Noto Sans CJK KR" pitchFamily="34" charset="0"/>
+                <a:ea typeface="Noto Sans CJK KR" pitchFamily="34" charset="-122"/>
+                <a:cs typeface="Noto Sans CJK KR" pitchFamily="34" charset="-120"/>
+              </a:rPr>
+              <a:t>분할</a:t>
+            </a:r>
+            <a:r>
+              <a:rPr lang="en-US" sz="2000" dirty="0">
+                <a:solidFill>
+                  <a:srgbClr val="666666"/>
+                </a:solidFill>
+                <a:latin typeface="Noto Sans CJK KR" pitchFamily="34" charset="0"/>
+                <a:ea typeface="Noto Sans CJK KR" pitchFamily="34" charset="-122"/>
+                <a:cs typeface="Noto Sans CJK KR" pitchFamily="34" charset="-120"/>
+              </a:rPr>
+              <a:t> </a:t>
+            </a:r>
+            <a:r>
+              <a:rPr lang="en-US" sz="2000" dirty="0" err="1">
+                <a:solidFill>
+                  <a:srgbClr val="666666"/>
+                </a:solidFill>
+                <a:latin typeface="Noto Sans CJK KR" pitchFamily="34" charset="0"/>
+                <a:ea typeface="Noto Sans CJK KR" pitchFamily="34" charset="-122"/>
+                <a:cs typeface="Noto Sans CJK KR" pitchFamily="34" charset="-120"/>
+              </a:rPr>
+              <a:t>접근</a:t>
+            </a:r>
+            <a:endParaRPr lang="en-US" sz="2000" dirty="0">
+              <a:solidFill>
+                <a:srgbClr val="666666"/>
+              </a:solidFill>
+              <a:latin typeface="Noto Sans CJK KR" pitchFamily="34" charset="0"/>
+              <a:ea typeface="Noto Sans CJK KR" pitchFamily="34" charset="-122"/>
+              <a:cs typeface="Noto Sans CJK KR" pitchFamily="34" charset="-120"/>
+            </a:endParaRPr>
           </a:p>
         </p:txBody>
       </p:sp>
@@ -1234,7 +1044,7 @@
           <a:bodyPr wrap="square" rtlCol="0" anchor="ctr"/>
           <a:lstStyle/>
           <a:p>
-            <a:pPr algn="r" indent="0" marL="0">
+            <a:pPr marL="0" indent="0" algn="r">
               <a:buNone/>
             </a:pPr>
             <a:r>
@@ -1249,6 +1059,124 @@
               <a:t>1</a:t>
             </a:r>
             <a:endParaRPr lang="en-US" sz="1200" dirty="0"/>
+          </a:p>
+        </p:txBody>
+      </p:sp>
+      <p:sp>
+        <p:nvSpPr>
+          <p:cNvPr id="5" name="Text 1">
+            <a:extLst>
+              <a:ext uri="{FF2B5EF4-FFF2-40B4-BE49-F238E27FC236}">
+                <a16:creationId xmlns:a16="http://schemas.microsoft.com/office/drawing/2014/main" id="{B33BE6BC-3DD7-4F12-A357-5154787D8F69}"/>
+              </a:ext>
+            </a:extLst>
+          </p:cNvPr>
+          <p:cNvSpPr/>
+          <p:nvPr/>
+        </p:nvSpPr>
+        <p:spPr>
+          <a:xfrm>
+            <a:off x="548640" y="3718346"/>
+            <a:ext cx="8046720" cy="594360"/>
+          </a:xfrm>
+          <a:prstGeom prst="rect">
+            <a:avLst/>
+          </a:prstGeom>
+          <a:noFill/>
+          <a:ln/>
+        </p:spPr>
+        <p:txBody>
+          <a:bodyPr wrap="square" rtlCol="0" anchor="ctr"/>
+          <a:lstStyle/>
+          <a:p>
+            <a:pPr marL="0" indent="0" algn="l">
+              <a:buNone/>
+            </a:pPr>
+            <a:r>
+              <a:rPr lang="en-US" sz="2000" dirty="0">
+                <a:solidFill>
+                  <a:srgbClr val="666666"/>
+                </a:solidFill>
+                <a:latin typeface="Noto Sans CJK KR" pitchFamily="34" charset="0"/>
+                <a:ea typeface="Noto Sans CJK KR" pitchFamily="34" charset="-122"/>
+                <a:cs typeface="Noto Sans CJK KR" pitchFamily="34" charset="-120"/>
+              </a:rPr>
+              <a:t>9</a:t>
+            </a:r>
+            <a:r>
+              <a:rPr lang="ko-KR" altLang="en-US" sz="2000" dirty="0">
+                <a:solidFill>
+                  <a:srgbClr val="666666"/>
+                </a:solidFill>
+                <a:latin typeface="Noto Sans CJK KR" pitchFamily="34" charset="0"/>
+                <a:ea typeface="Noto Sans CJK KR" pitchFamily="34" charset="-122"/>
+                <a:cs typeface="Noto Sans CJK KR" pitchFamily="34" charset="-120"/>
+              </a:rPr>
+              <a:t>조 </a:t>
+            </a:r>
+            <a:r>
+              <a:rPr lang="en-US" altLang="ko-KR" sz="2000" dirty="0">
+                <a:solidFill>
+                  <a:srgbClr val="666666"/>
+                </a:solidFill>
+                <a:latin typeface="Noto Sans CJK KR" pitchFamily="34" charset="0"/>
+                <a:ea typeface="Noto Sans CJK KR" pitchFamily="34" charset="-122"/>
+                <a:cs typeface="Noto Sans CJK KR" pitchFamily="34" charset="-120"/>
+              </a:rPr>
+              <a:t>(</a:t>
+            </a:r>
+            <a:r>
+              <a:rPr lang="ko-KR" altLang="en-US" sz="2000" dirty="0" err="1">
+                <a:solidFill>
+                  <a:srgbClr val="666666"/>
+                </a:solidFill>
+                <a:latin typeface="Noto Sans CJK KR" pitchFamily="34" charset="0"/>
+                <a:ea typeface="Noto Sans CJK KR" pitchFamily="34" charset="-122"/>
+                <a:cs typeface="Noto Sans CJK KR" pitchFamily="34" charset="-120"/>
+              </a:rPr>
+              <a:t>정신수</a:t>
+            </a:r>
+            <a:r>
+              <a:rPr lang="en-US" altLang="ko-KR" sz="2000" dirty="0">
+                <a:solidFill>
+                  <a:srgbClr val="666666"/>
+                </a:solidFill>
+                <a:latin typeface="Noto Sans CJK KR" pitchFamily="34" charset="0"/>
+                <a:ea typeface="Noto Sans CJK KR" pitchFamily="34" charset="-122"/>
+                <a:cs typeface="Noto Sans CJK KR" pitchFamily="34" charset="-120"/>
+              </a:rPr>
+              <a:t>, </a:t>
+            </a:r>
+            <a:r>
+              <a:rPr lang="ko-KR" altLang="en-US" sz="2000" dirty="0" err="1">
+                <a:solidFill>
+                  <a:srgbClr val="666666"/>
+                </a:solidFill>
+                <a:latin typeface="Noto Sans CJK KR" pitchFamily="34" charset="0"/>
+                <a:ea typeface="Noto Sans CJK KR" pitchFamily="34" charset="-122"/>
+                <a:cs typeface="Noto Sans CJK KR" pitchFamily="34" charset="-120"/>
+              </a:rPr>
+              <a:t>우동엽</a:t>
+            </a:r>
+            <a:r>
+              <a:rPr lang="en-US" altLang="ko-KR" sz="2000" dirty="0">
+                <a:solidFill>
+                  <a:srgbClr val="666666"/>
+                </a:solidFill>
+                <a:latin typeface="Noto Sans CJK KR" pitchFamily="34" charset="0"/>
+                <a:ea typeface="Noto Sans CJK KR" pitchFamily="34" charset="-122"/>
+                <a:cs typeface="Noto Sans CJK KR" pitchFamily="34" charset="-120"/>
+              </a:rPr>
+              <a:t>)</a:t>
+            </a:r>
+            <a:endParaRPr lang="en-US" sz="2000" dirty="0">
+              <a:solidFill>
+                <a:srgbClr val="666666"/>
+              </a:solidFill>
+              <a:latin typeface="Noto Sans CJK KR" pitchFamily="34" charset="0"/>
+              <a:ea typeface="Noto Sans CJK KR" pitchFamily="34" charset="-122"/>
+              <a:cs typeface="Noto Sans CJK KR" pitchFamily="34" charset="-120"/>
+            </a:endParaRPr>
           </a:p>
         </p:txBody>
       </p:sp>
@@ -1298,7 +1226,7 @@
           <a:bodyPr wrap="square" lIns="0" tIns="0" rIns="0" bIns="0" rtlCol="0" anchor="ctr"/>
           <a:lstStyle/>
           <a:p>
-            <a:pPr indent="0" marL="0">
+            <a:pPr marL="0" indent="0">
               <a:buNone/>
             </a:pPr>
             <a:r>
@@ -1345,6 +1273,17 @@
               <a:buChar char="•"/>
             </a:pPr>
             <a:r>
+              <a:rPr lang="en-US" sz="2000" dirty="0" err="1">
+                <a:solidFill>
+                  <a:srgbClr val="222222"/>
+                </a:solidFill>
+                <a:latin typeface="Noto Sans CJK KR" pitchFamily="34" charset="0"/>
+                <a:ea typeface="Noto Sans CJK KR" pitchFamily="34" charset="-122"/>
+                <a:cs typeface="Noto Sans CJK KR" pitchFamily="34" charset="-120"/>
+              </a:rPr>
+              <a:t>RT·안전-critical</a:t>
+            </a:r>
+            <a:r>
               <a:rPr lang="en-US" sz="2000" dirty="0">
                 <a:solidFill>
                   <a:srgbClr val="222222"/>
@@ -1353,12 +1292,45 @@
                 <a:ea typeface="Noto Sans CJK KR" pitchFamily="34" charset="-122"/>
                 <a:cs typeface="Noto Sans CJK KR" pitchFamily="34" charset="-120"/>
               </a:rPr>
-              <a:t>RT·안전-critical 시스템의 요구사항</a:t>
+              <a:t> </a:t>
+            </a:r>
+            <a:r>
+              <a:rPr lang="ko-KR" altLang="en-US" sz="2000" dirty="0">
+                <a:solidFill>
+                  <a:srgbClr val="222222"/>
+                </a:solidFill>
+                <a:latin typeface="Noto Sans CJK KR" pitchFamily="34" charset="0"/>
+                <a:ea typeface="Noto Sans CJK KR" pitchFamily="34" charset="-122"/>
+                <a:cs typeface="Noto Sans CJK KR" pitchFamily="34" charset="-120"/>
+              </a:rPr>
+              <a:t>통신 </a:t>
+            </a:r>
+            <a:r>
+              <a:rPr lang="en-US" sz="2000" dirty="0" err="1">
+                <a:solidFill>
+                  <a:srgbClr val="222222"/>
+                </a:solidFill>
+                <a:latin typeface="Noto Sans CJK KR" pitchFamily="34" charset="0"/>
+                <a:ea typeface="Noto Sans CJK KR" pitchFamily="34" charset="-122"/>
+                <a:cs typeface="Noto Sans CJK KR" pitchFamily="34" charset="-120"/>
+              </a:rPr>
+              <a:t>시스템의</a:t>
+            </a:r>
+            <a:r>
+              <a:rPr lang="en-US" sz="2000" dirty="0">
+                <a:solidFill>
+                  <a:srgbClr val="222222"/>
+                </a:solidFill>
+                <a:latin typeface="Noto Sans CJK KR" pitchFamily="34" charset="0"/>
+                <a:ea typeface="Noto Sans CJK KR" pitchFamily="34" charset="-122"/>
+                <a:cs typeface="Noto Sans CJK KR" pitchFamily="34" charset="-120"/>
+              </a:rPr>
+              <a:t> 요구사항</a:t>
             </a:r>
             <a:endParaRPr lang="en-US" sz="2000" dirty="0"/>
           </a:p>
           <a:p>
-            <a:pPr lvl="1" marL="685800" indent="-342900">
+            <a:pPr marL="685800" lvl="1" indent="-342900">
               <a:spcAft>
                 <a:spcPts val="800"/>
               </a:spcAft>
@@ -1379,7 +1351,7 @@
             <a:endParaRPr lang="en-US" sz="2000" dirty="0"/>
           </a:p>
           <a:p>
-            <a:pPr lvl="1" marL="685800" indent="-342900">
+            <a:pPr marL="685800" lvl="1" indent="-342900">
               <a:spcAft>
                 <a:spcPts val="800"/>
               </a:spcAft>
@@ -1421,7 +1393,7 @@
             <a:endParaRPr lang="en-US" sz="2000" dirty="0"/>
           </a:p>
           <a:p>
-            <a:pPr lvl="1" marL="685800" indent="-342900">
+            <a:pPr marL="685800" lvl="1" indent="-342900">
               <a:spcAft>
                 <a:spcPts val="800"/>
               </a:spcAft>
@@ -1482,7 +1454,7 @@
           <a:bodyPr wrap="square" rtlCol="0" anchor="ctr"/>
           <a:lstStyle/>
           <a:p>
-            <a:pPr algn="r" indent="0" marL="0">
+            <a:pPr marL="0" indent="0" algn="r">
               <a:buNone/>
             </a:pPr>
             <a:r>
@@ -1546,7 +1518,7 @@
           <a:bodyPr wrap="square" lIns="0" tIns="0" rIns="0" bIns="0" rtlCol="0" anchor="ctr"/>
           <a:lstStyle/>
           <a:p>
-            <a:pPr indent="0" marL="0">
+            <a:pPr marL="0" indent="0">
               <a:buNone/>
             </a:pPr>
             <a:r>
@@ -1606,7 +1578,7 @@
             <a:endParaRPr lang="en-US" sz="2000" dirty="0"/>
           </a:p>
           <a:p>
-            <a:pPr lvl="1" marL="685800" indent="-342900">
+            <a:pPr marL="685800" lvl="1" indent="-342900">
               <a:spcAft>
                 <a:spcPts val="800"/>
               </a:spcAft>
@@ -1627,7 +1599,7 @@
             <a:endParaRPr lang="en-US" sz="2000" dirty="0"/>
           </a:p>
           <a:p>
-            <a:pPr lvl="1" marL="685800" indent="-342900">
+            <a:pPr marL="685800" lvl="1" indent="-342900">
               <a:spcAft>
                 <a:spcPts val="800"/>
               </a:spcAft>
@@ -1709,7 +1681,7 @@
           <a:bodyPr wrap="square" rtlCol="0" anchor="ctr"/>
           <a:lstStyle/>
           <a:p>
-            <a:pPr algn="r" indent="0" marL="0">
+            <a:pPr marL="0" indent="0" algn="r">
               <a:buNone/>
             </a:pPr>
             <a:r>
@@ -1773,7 +1745,7 @@
           <a:bodyPr wrap="square" lIns="0" tIns="0" rIns="0" bIns="0" rtlCol="0" anchor="ctr"/>
           <a:lstStyle/>
           <a:p>
-            <a:pPr indent="0" marL="0">
+            <a:pPr marL="0" indent="0">
               <a:buNone/>
             </a:pPr>
             <a:r>
@@ -1833,7 +1805,7 @@
             <a:endParaRPr lang="en-US" sz="2000" dirty="0"/>
           </a:p>
           <a:p>
-            <a:pPr lvl="1" marL="685800" indent="-342900">
+            <a:pPr marL="685800" lvl="1" indent="-342900">
               <a:spcAft>
                 <a:spcPts val="800"/>
               </a:spcAft>
@@ -1915,7 +1887,7 @@
           <a:bodyPr wrap="square" rtlCol="0" anchor="ctr"/>
           <a:lstStyle/>
           <a:p>
-            <a:pPr algn="r" indent="0" marL="0">
+            <a:pPr marL="0" indent="0" algn="r">
               <a:buNone/>
             </a:pPr>
             <a:r>
@@ -2234,4 +2206,319 @@
     </a:ext>
   </a:extLst>
 </a:theme>
+</file>
+
+<file path=ppt/theme/theme2.xml><?xml version="1.0" encoding="utf-8"?>
+<a:theme xmlns:a="http://schemas.openxmlformats.org/drawingml/2006/main" name="Office 테마">
+  <a:themeElements>
+    <a:clrScheme name="Office">
+      <a:dk1>
+        <a:sysClr val="windowText" lastClr="000000"/>
+      </a:dk1>
+      <a:lt1>
+        <a:sysClr val="window" lastClr="FFFFFF"/>
+      </a:lt1>
+      <a:dk2>
+        <a:srgbClr val="0E2841"/>
+      </a:dk2>
+      <a:lt2>
+        <a:srgbClr val="E8E8E8"/>
+      </a:lt2>
+      <a:accent1>
+        <a:srgbClr val="156082"/>
+      </a:accent1>
+      <a:accent2>
+        <a:srgbClr val="E97132"/>
+      </a:accent2>
+      <a:accent3>
+        <a:srgbClr val="196B24"/>
+      </a:accent3>
+      <a:accent4>
+        <a:srgbClr val="0F9ED5"/>
+      </a:accent4>
+      <a:accent5>
+        <a:srgbClr val="A02B93"/>
+      </a:accent5>
+      <a:accent6>
+        <a:srgbClr val="4EA72E"/>
+      </a:accent6>
+      <a:hlink>
+        <a:srgbClr val="467886"/>
+      </a:hlink>
+      <a:folHlink>
+        <a:srgbClr val="96607D"/>
+      </a:folHlink>
+    </a:clrScheme>
+    <a:fontScheme name="Office">
+      <a:majorFont>
+        <a:latin typeface="맑은 고딕" panose="02110004020202020204"/>
+        <a:ea typeface=""/>
+        <a:cs typeface=""/>
+        <a:font script="Jpan" typeface="游ゴシック Light"/>
+        <a:font script="Hang" typeface="맑은 고딕"/>
+        <a:font script="Hans" typeface="等线 Light"/>
+        <a:font script="Hant" typeface="新細明體"/>
+        <a:font script="Arab" typeface="Times New Roman"/>
+        <a:font script="Hebr" typeface="Times New Roman"/>
+        <a:font script="Thai" typeface="Angsana New"/>
+        <a:font script="Ethi" typeface="Nyala"/>
+        <a:font script="Beng" typeface="Vrinda"/>
+        <a:font script="Gujr" typeface="Shruti"/>
+        <a:font script="Khmr" typeface="MoolBoran"/>
+        <a:font script="Knda" typeface="Tunga"/>
+        <a:font script="Guru" typeface="Raavi"/>
+        <a:font script="Cans" typeface="Euphemia"/>
+        <a:font script="Cher" typeface="Plantagenet Cherokee"/>
+        <a:font script="Yiii" typeface="Microsoft Yi Baiti"/>
+        <a:font script="Tibt" typeface="Microsoft Himalaya"/>
+        <a:font script="Thaa" typeface="MV Boli"/>
+        <a:font script="Deva" typeface="Mangal"/>
+        <a:font script="Telu" typeface="Gautami"/>
+        <a:font script="Taml" typeface="Latha"/>
+        <a:font script="Syrc" typeface="Estrangelo Edessa"/>
+        <a:font script="Orya" typeface="Kalinga"/>
+        <a:font script="Mlym" typeface="Kartika"/>
+        <a:font script="Laoo" typeface="DokChampa"/>
+        <a:font script="Sinh" typeface="Iskoola Pota"/>
+        <a:font script="Mong" typeface="Mongolian Baiti"/>
+        <a:font script="Viet" typeface="Times New Roman"/>
+        <a:font script="Uigh" typeface="Microsoft Uighur"/>
+        <a:font script="Geor" typeface="Sylfaen"/>
+        <a:font script="Armn" typeface="Arial"/>
+        <a:font script="Bugi" typeface="Leelawadee UI"/>
+        <a:font script="Bopo" typeface="Microsoft JhengHei"/>
+        <a:font script="Java" typeface="Javanese Text"/>
+        <a:font script="Lisu" typeface="Segoe UI"/>
+        <a:font script="Mymr" typeface="Myanmar Text"/>
+        <a:font script="Nkoo" typeface="Ebrima"/>
+        <a:font script="Olck" typeface="Nirmala UI"/>
+        <a:font script="Osma" typeface="Ebrima"/>
+        <a:font script="Phag" typeface="Phagspa"/>
+        <a:font script="Syrn" typeface="Estrangelo Edessa"/>
+        <a:font script="Syrj" typeface="Estrangelo Edessa"/>
+        <a:font script="Syre" typeface="Estrangelo Edessa"/>
+        <a:font script="Sora" typeface="Nirmala UI"/>
+        <a:font script="Tale" typeface="Microsoft Tai Le"/>
+        <a:font script="Talu" typeface="Microsoft New Tai Lue"/>
+        <a:font script="Tfng" typeface="Ebrima"/>
+      </a:majorFont>
+      <a:minorFont>
+        <a:latin typeface="맑은 고딕" panose="02110004020202020204"/>
+        <a:ea typeface=""/>
+        <a:cs typeface=""/>
+        <a:font script="Jpan" typeface="游ゴシック"/>
+        <a:font script="Hang" typeface="맑은 고딕"/>
+        <a:font script="Hans" typeface="等线"/>
+        <a:font script="Hant" typeface="新細明體"/>
+        <a:font script="Arab" typeface="Arial"/>
+        <a:font script="Hebr" typeface="Arial"/>
+        <a:font script="Thai" typeface="Cordia New"/>
+        <a:font script="Ethi" typeface="Nyala"/>
+        <a:font script="Beng" typeface="Vrinda"/>
+        <a:font script="Gujr" typeface="Shruti"/>
+        <a:font script="Khmr" typeface="DaunPenh"/>
+        <a:font script="Knda" typeface="Tunga"/>
+        <a:font script="Guru" typeface="Raavi"/>
+        <a:font script="Cans" typeface="Euphemia"/>
+        <a:font script="Cher" typeface="Plantagenet Cherokee"/>
+        <a:font script="Yiii" typeface="Microsoft Yi Baiti"/>
+        <a:font script="Tibt" typeface="Microsoft Himalaya"/>
+        <a:font script="Thaa" typeface="MV Boli"/>
+        <a:font script="Deva" typeface="Mangal"/>
+        <a:font script="Telu" typeface="Gautami"/>
+        <a:font script="Taml" typeface="Latha"/>
+        <a:font script="Syrc" typeface="Estrangelo Edessa"/>
+        <a:font script="Orya" typeface="Kalinga"/>
+        <a:font script="Mlym" typeface="Kartika"/>
+        <a:font script="Laoo" typeface="DokChampa"/>
+        <a:font script="Sinh" typeface="Iskoola Pota"/>
+        <a:font script="Mong" typeface="Mongolian Baiti"/>
+        <a:font script="Viet" typeface="Arial"/>
+        <a:font script="Uigh" typeface="Microsoft Uighur"/>
+        <a:font script="Geor" typeface="Sylfaen"/>
+        <a:font script="Armn" typeface="Arial"/>
+        <a:font script="Bugi" typeface="Leelawadee UI"/>
+        <a:font script="Bopo" typeface="Microsoft JhengHei"/>
+        <a:font script="Java" typeface="Javanese Text"/>
+        <a:font script="Lisu" typeface="Segoe UI"/>
+        <a:font script="Mymr" typeface="Myanmar Text"/>
+        <a:font script="Nkoo" typeface="Ebrima"/>
+        <a:font script="Olck" typeface="Nirmala UI"/>
+        <a:font script="Osma" typeface="Ebrima"/>
+        <a:font script="Phag" typeface="Phagspa"/>
+        <a:font script="Syrn" typeface="Estrangelo Edessa"/>
+        <a:font script="Syrj" typeface="Estrangelo Edessa"/>
+        <a:font script="Syre" typeface="Estrangelo Edessa"/>
+        <a:font script="Sora" typeface="Nirmala UI"/>
+        <a:font script="Tale" typeface="Microsoft Tai Le"/>
+        <a:font script="Talu" typeface="Microsoft New Tai Lue"/>
+        <a:font script="Tfng" typeface="Ebrima"/>
+      </a:minorFont>
+    </a:fontScheme>
+    <a:fmtScheme name="Office">
+      <a:fillStyleLst>
+        <a:solidFill>
+          <a:schemeClr val="phClr"/>
+        </a:solidFill>
+        <a:gradFill rotWithShape="1">
+          <a:gsLst>
+            <a:gs pos="0">
+              <a:schemeClr val="phClr">
+                <a:lumMod val="110000"/>
+                <a:satMod val="105000"/>
+                <a:tint val="67000"/>
+              </a:schemeClr>
+            </a:gs>
+            <a:gs pos="50000">
+              <a:schemeClr val="phClr">
+                <a:lumMod val="105000"/>
+                <a:satMod val="103000"/>
+                <a:tint val="73000"/>
+              </a:schemeClr>
+            </a:gs>
+            <a:gs pos="100000">
+              <a:schemeClr val="phClr">
+                <a:lumMod val="105000"/>
+                <a:satMod val="109000"/>
+                <a:tint val="81000"/>
+              </a:schemeClr>
+            </a:gs>
+          </a:gsLst>
+          <a:lin ang="5400000" scaled="0"/>
+        </a:gradFill>
+        <a:gradFill rotWithShape="1">
+          <a:gsLst>
+            <a:gs pos="0">
+              <a:schemeClr val="phClr">
+                <a:satMod val="103000"/>
+                <a:lumMod val="102000"/>
+                <a:tint val="94000"/>
+              </a:schemeClr>
+            </a:gs>
+            <a:gs pos="50000">
+              <a:schemeClr val="phClr">
+                <a:satMod val="110000"/>
+                <a:lumMod val="100000"/>
+                <a:shade val="100000"/>
+              </a:schemeClr>
+            </a:gs>
+            <a:gs pos="100000">
+              <a:schemeClr val="phClr">
+                <a:lumMod val="99000"/>
+                <a:satMod val="120000"/>
+                <a:shade val="78000"/>
+              </a:schemeClr>
+            </a:gs>
+          </a:gsLst>
+          <a:lin ang="5400000" scaled="0"/>
+        </a:gradFill>
+      </a:fillStyleLst>
+      <a:lnStyleLst>
+        <a:ln w="12700" cap="flat" cmpd="sng" algn="ctr">
+          <a:solidFill>
+            <a:schemeClr val="phClr"/>
+          </a:solidFill>
+          <a:prstDash val="solid"/>
+          <a:miter lim="800000"/>
+        </a:ln>
+        <a:ln w="19050" cap="flat" cmpd="sng" algn="ctr">
+          <a:solidFill>
+            <a:schemeClr val="phClr"/>
+          </a:solidFill>
+          <a:prstDash val="solid"/>
+          <a:miter lim="800000"/>
+        </a:ln>
+        <a:ln w="25400" cap="flat" cmpd="sng" algn="ctr">
+          <a:solidFill>
+            <a:schemeClr val="phClr"/>
+          </a:solidFill>
+          <a:prstDash val="solid"/>
+          <a:miter lim="800000"/>
+        </a:ln>
+      </a:lnStyleLst>
+      <a:effectStyleLst>
+        <a:effectStyle>
+          <a:effectLst/>
+        </a:effectStyle>
+        <a:effectStyle>
+          <a:effectLst/>
+        </a:effectStyle>
+        <a:effectStyle>
+          <a:effectLst>
+            <a:outerShdw blurRad="57150" dist="19050" dir="5400000" algn="ctr" rotWithShape="0">
+              <a:srgbClr val="000000">
+                <a:alpha val="63000"/>
+              </a:srgbClr>
+            </a:outerShdw>
+          </a:effectLst>
+        </a:effectStyle>
+      </a:effectStyleLst>
+      <a:bgFillStyleLst>
+        <a:solidFill>
+          <a:schemeClr val="phClr"/>
+        </a:solidFill>
+        <a:solidFill>
+          <a:schemeClr val="phClr">
+            <a:tint val="95000"/>
+            <a:satMod val="170000"/>
+          </a:schemeClr>
+        </a:solidFill>
+        <a:gradFill rotWithShape="1">
+          <a:gsLst>
+            <a:gs pos="0">
+              <a:schemeClr val="phClr">
+                <a:tint val="93000"/>
+                <a:satMod val="150000"/>
+                <a:shade val="98000"/>
+                <a:lumMod val="102000"/>
+              </a:schemeClr>
+            </a:gs>
+            <a:gs pos="50000">
+              <a:schemeClr val="phClr">
+                <a:tint val="98000"/>
+                <a:satMod val="130000"/>
+                <a:shade val="90000"/>
+                <a:lumMod val="103000"/>
+              </a:schemeClr>
+            </a:gs>
+            <a:gs pos="100000">
+              <a:schemeClr val="phClr">
+                <a:shade val="63000"/>
+                <a:satMod val="120000"/>
+              </a:schemeClr>
+            </a:gs>
+          </a:gsLst>
+          <a:lin ang="5400000" scaled="0"/>
+        </a:gradFill>
+      </a:bgFillStyleLst>
+    </a:fmtScheme>
+  </a:themeElements>
+  <a:objectDefaults>
+    <a:lnDef>
+      <a:spPr/>
+      <a:bodyPr/>
+      <a:lstStyle/>
+      <a:style>
+        <a:lnRef idx="2">
+          <a:schemeClr val="accent1"/>
+        </a:lnRef>
+        <a:fillRef idx="0">
+          <a:schemeClr val="accent1"/>
+        </a:fillRef>
+        <a:effectRef idx="1">
+          <a:schemeClr val="accent1"/>
+        </a:effectRef>
+        <a:fontRef idx="minor">
+          <a:schemeClr val="tx1"/>
+        </a:fontRef>
+      </a:style>
+    </a:lnDef>
+  </a:objectDefaults>
+  <a:extraClrSchemeLst/>
+  <a:extLst>
+    <a:ext uri="{05A4C25C-085E-4340-85A3-A5531E510DB2}">
+      <thm15:themeFamily xmlns:thm15="http://schemas.microsoft.com/office/thememl/2012/main" name="Office Theme" id="{2E142A2C-CD16-42D6-873A-C26D2A0506FA}" vid="{1BDDFF52-6CD6-40A5-AB3C-68EB2F1E4D0A}"/>
+    </a:ext>
+  </a:extLst>
+</a:theme>
 </file>